--- a/data/employees/EMP030/AST-EMP030-01.pptx
+++ b/data/employees/EMP030/AST-EMP030-01.pptx
@@ -9,6 +9,7 @@
     <p:sldId id="257" r:id="rId8"/>
     <p:sldId id="258" r:id="rId9"/>
     <p:sldId id="259" r:id="rId10"/>
+    <p:sldId id="260" r:id="rId11"/>
   </p:sldIdLst>
   <p:sldSz cx="9144000" cy="6858000" type="screen4x3"/>
   <p:notesSz cx="6858000" cy="9144000"/>
@@ -3098,42 +3099,55 @@
             <a:spLocks noGrp="1"/>
           </p:cNvSpPr>
           <p:nvPr>
-            <p:ph type="ctrTitle"/>
-          </p:nvPr>
-        </p:nvSpPr>
-        <p:spPr/>
-        <p:txBody>
-          <a:bodyPr/>
-          <a:lstStyle/>
-          <a:p>
-            <a:r>
-              <a:t>Project update deck - EMP030</a:t>
-            </a:r>
-          </a:p>
-        </p:txBody>
-      </p:sp>
-      <p:sp>
-        <p:nvSpPr>
-          <p:cNvPr id="3" name="Subtitle 2"/>
-          <p:cNvSpPr>
-            <a:spLocks noGrp="1"/>
-          </p:cNvSpPr>
-          <p:nvPr>
-            <p:ph type="subTitle" idx="1"/>
-          </p:nvPr>
-        </p:nvSpPr>
-        <p:spPr/>
-        <p:txBody>
-          <a:bodyPr/>
-          <a:lstStyle/>
-          <a:p>
-            <a:r>
-              <a:t>Skyler Chen | Specialist | Operations</a:t>
-            </a:r>
-          </a:p>
-          <a:p>
-            <a:r>
-              <a:t>Prepared: 2025-02-01</a:t>
+            <p:ph type="title"/>
+          </p:nvPr>
+        </p:nvSpPr>
+        <p:spPr/>
+        <p:txBody>
+          <a:bodyPr/>
+          <a:lstStyle/>
+          <a:p>
+            <a:r>
+              <a:t>Ast Emp030 01 - EMP030</a:t>
+            </a:r>
+          </a:p>
+        </p:txBody>
+      </p:sp>
+      <p:sp>
+        <p:nvSpPr>
+          <p:cNvPr id="3" name="Content Placeholder 2"/>
+          <p:cNvSpPr>
+            <a:spLocks noGrp="1"/>
+          </p:cNvSpPr>
+          <p:nvPr>
+            <p:ph idx="1"/>
+          </p:nvPr>
+        </p:nvSpPr>
+        <p:spPr/>
+        <p:txBody>
+          <a:bodyPr/>
+          <a:lstStyle/>
+          <a:p>
+            <a:r>
+              <a:t>Slide 1: Executive Summary</a:t>
+            </a:r>
+          </a:p>
+          <a:p>
+            <a:pPr lvl="1"/>
+            <a:r>
+              <a:t>Section 1: Department KPI performance. EMP030 contributes to ast emp030 01 through recurring collaboration, clear ownership boundaries, and measurable outcomes. The team captures decisions, open issues, and handoffs so that knowledge remains discoverable for future programs.</a:t>
+            </a:r>
+          </a:p>
+          <a:p>
+            <a:pPr lvl="1"/>
+            <a:r>
+              <a:t>Section 2: Knowledge transfer and onboarding. EMP030 contributes to ast emp030 01 through recurring collaboration, clear ownership boundaries, and measurable outcomes. The team captures decisions, open issues, and handoffs so that knowledge remains discoverable for future programs.</a:t>
+            </a:r>
+          </a:p>
+          <a:p>
+            <a:pPr lvl="1"/>
+            <a:r>
+              <a:t>Section 3: Operational risk review. EMP030 contributes to ast emp030 01 through recurring collaboration, clear ownership boundaries, and measurable outcomes. The team captures decisions, open issues, and handoffs so that knowledge remains discoverable for future programs.</a:t>
             </a:r>
           </a:p>
         </p:txBody>
@@ -3172,7 +3186,7 @@
           <a:lstStyle/>
           <a:p>
             <a:r>
-              <a:t>Shift Productivity Dashboard</a:t>
+              <a:t>Ast Emp030 01 - EMP030</a:t>
             </a:r>
           </a:p>
         </p:txBody>
@@ -3193,17 +3207,25 @@
           <a:lstStyle/>
           <a:p>
             <a:r>
-              <a:t>Overview of Shift Productivity Dashboard for Operations department.</a:t>
-            </a:r>
-          </a:p>
-          <a:p>
-            <a:r>
-              <a:t>Responsible: Skyler Chen (Specialist)</a:t>
-            </a:r>
-          </a:p>
-          <a:p>
-            <a:r>
-              <a:t>Location: Fremont | Skills: Fabric, Azure AI, Python, SQL</a:t>
+              <a:t>Slide 2: Executive Summary</a:t>
+            </a:r>
+          </a:p>
+          <a:p>
+            <a:pPr lvl="1"/>
+            <a:r>
+              <a:t>Section 1: Quarterly delivery milestones. EMP030 contributes to ast emp030 01 through recurring collaboration, clear ownership boundaries, and measurable outcomes. The team captures decisions, open issues, and handoffs so that knowledge remains discoverable for future programs.</a:t>
+            </a:r>
+          </a:p>
+          <a:p>
+            <a:pPr lvl="1"/>
+            <a:r>
+              <a:t>Section 2: Fabric semantic model planning. EMP030 contributes to ast emp030 01 through recurring collaboration, clear ownership boundaries, and measurable outcomes. The team captures decisions, open issues, and handoffs so that knowledge remains discoverable for future programs.</a:t>
+            </a:r>
+          </a:p>
+          <a:p>
+            <a:pPr lvl="1"/>
+            <a:r>
+              <a:t>Section 3: Data quality remediation. EMP030 contributes to ast emp030 01 through recurring collaboration, clear ownership boundaries, and measurable outcomes. The team captures decisions, open issues, and handoffs so that knowledge remains discoverable for future programs.</a:t>
             </a:r>
           </a:p>
         </p:txBody>
@@ -3242,7 +3264,7 @@
           <a:lstStyle/>
           <a:p>
             <a:r>
-              <a:t>Throughput vs. Target</a:t>
+              <a:t>Ast Emp030 01 - EMP030</a:t>
             </a:r>
           </a:p>
         </p:txBody>
@@ -3263,17 +3285,25 @@
           <a:lstStyle/>
           <a:p>
             <a:r>
-              <a:t>Overview of Throughput vs. Target for Operations department.</a:t>
-            </a:r>
-          </a:p>
-          <a:p>
-            <a:r>
-              <a:t>Responsible: Skyler Chen (Specialist)</a:t>
-            </a:r>
-          </a:p>
-          <a:p>
-            <a:r>
-              <a:t>Location: Fremont | Skills: Fabric, Azure AI, Python, SQL</a:t>
+              <a:t>Slide 3: Executive Summary</a:t>
+            </a:r>
+          </a:p>
+          <a:p>
+            <a:pPr lvl="1"/>
+            <a:r>
+              <a:t>Section 1: Data quality remediation. EMP030 contributes to ast emp030 01 through recurring collaboration, clear ownership boundaries, and measurable outcomes. The team captures decisions, open issues, and handoffs so that knowledge remains discoverable for future programs.</a:t>
+            </a:r>
+          </a:p>
+          <a:p>
+            <a:pPr lvl="1"/>
+            <a:r>
+              <a:t>Section 2: Quarterly delivery milestones. EMP030 contributes to ast emp030 01 through recurring collaboration, clear ownership boundaries, and measurable outcomes. The team captures decisions, open issues, and handoffs so that knowledge remains discoverable for future programs.</a:t>
+            </a:r>
+          </a:p>
+          <a:p>
+            <a:pPr lvl="1"/>
+            <a:r>
+              <a:t>Section 3: Knowledge transfer and onboarding. EMP030 contributes to ast emp030 01 through recurring collaboration, clear ownership boundaries, and measurable outcomes. The team captures decisions, open issues, and handoffs so that knowledge remains discoverable for future programs.</a:t>
             </a:r>
           </a:p>
         </p:txBody>
@@ -3312,7 +3342,7 @@
           <a:lstStyle/>
           <a:p>
             <a:r>
-              <a:t>Incident Response Metrics</a:t>
+              <a:t>Ast Emp030 01 - EMP030</a:t>
             </a:r>
           </a:p>
         </p:txBody>
@@ -3333,17 +3363,103 @@
           <a:lstStyle/>
           <a:p>
             <a:r>
-              <a:t>Overview of Incident Response Metrics for Operations department.</a:t>
-            </a:r>
-          </a:p>
-          <a:p>
-            <a:r>
-              <a:t>Responsible: Skyler Chen (Specialist)</a:t>
-            </a:r>
-          </a:p>
-          <a:p>
-            <a:r>
-              <a:t>Location: Fremont | Skills: Fabric, Azure AI, Python, SQL</a:t>
+              <a:t>Slide 4: Executive Summary</a:t>
+            </a:r>
+          </a:p>
+          <a:p>
+            <a:pPr lvl="1"/>
+            <a:r>
+              <a:t>Section 1: Data quality remediation. EMP030 contributes to ast emp030 01 through recurring collaboration, clear ownership boundaries, and measurable outcomes. The team captures decisions, open issues, and handoffs so that knowledge remains discoverable for future programs.</a:t>
+            </a:r>
+          </a:p>
+          <a:p>
+            <a:pPr lvl="1"/>
+            <a:r>
+              <a:t>Section 2: Automation backlog refinement. EMP030 contributes to ast emp030 01 through recurring collaboration, clear ownership boundaries, and measurable outcomes. The team captures decisions, open issues, and handoffs so that knowledge remains discoverable for future programs.</a:t>
+            </a:r>
+          </a:p>
+          <a:p>
+            <a:pPr lvl="1"/>
+            <a:r>
+              <a:t>Section 3: Data quality remediation. EMP030 contributes to ast emp030 01 through recurring collaboration, clear ownership boundaries, and measurable outcomes. The team captures decisions, open issues, and handoffs so that knowledge remains discoverable for future programs.</a:t>
+            </a:r>
+          </a:p>
+        </p:txBody>
+      </p:sp>
+    </p:spTree>
+  </p:cSld>
+  <p:clrMapOvr>
+    <a:masterClrMapping/>
+  </p:clrMapOvr>
+</p:sld>
+</file>
+
+<file path=ppt/slides/slide5.xml><?xml version="1.0" encoding="utf-8"?>
+<p:sld xmlns:a="http://schemas.openxmlformats.org/drawingml/2006/main" xmlns:p="http://schemas.openxmlformats.org/presentationml/2006/main" xmlns:r="http://schemas.openxmlformats.org/officeDocument/2006/relationships">
+  <p:cSld>
+    <p:spTree>
+      <p:nvGrpSpPr>
+        <p:cNvPr id="1" name=""/>
+        <p:cNvGrpSpPr/>
+        <p:nvPr/>
+      </p:nvGrpSpPr>
+      <p:grpSpPr/>
+      <p:sp>
+        <p:nvSpPr>
+          <p:cNvPr id="2" name="Title 1"/>
+          <p:cNvSpPr>
+            <a:spLocks noGrp="1"/>
+          </p:cNvSpPr>
+          <p:nvPr>
+            <p:ph type="title"/>
+          </p:nvPr>
+        </p:nvSpPr>
+        <p:spPr/>
+        <p:txBody>
+          <a:bodyPr/>
+          <a:lstStyle/>
+          <a:p>
+            <a:r>
+              <a:t>Ast Emp030 01 - EMP030</a:t>
+            </a:r>
+          </a:p>
+        </p:txBody>
+      </p:sp>
+      <p:sp>
+        <p:nvSpPr>
+          <p:cNvPr id="3" name="Content Placeholder 2"/>
+          <p:cNvSpPr>
+            <a:spLocks noGrp="1"/>
+          </p:cNvSpPr>
+          <p:nvPr>
+            <p:ph idx="1"/>
+          </p:nvPr>
+        </p:nvSpPr>
+        <p:spPr/>
+        <p:txBody>
+          <a:bodyPr/>
+          <a:lstStyle/>
+          <a:p>
+            <a:r>
+              <a:t>Slide 5: Executive Summary</a:t>
+            </a:r>
+          </a:p>
+          <a:p>
+            <a:pPr lvl="1"/>
+            <a:r>
+              <a:t>Section 1: Knowledge transfer and onboarding. EMP030 contributes to ast emp030 01 through recurring collaboration, clear ownership boundaries, and measurable outcomes. The team captures decisions, open issues, and handoffs so that knowledge remains discoverable for future programs.</a:t>
+            </a:r>
+          </a:p>
+          <a:p>
+            <a:pPr lvl="1"/>
+            <a:r>
+              <a:t>Section 2: Operational risk review. EMP030 contributes to ast emp030 01 through recurring collaboration, clear ownership boundaries, and measurable outcomes. The team captures decisions, open issues, and handoffs so that knowledge remains discoverable for future programs.</a:t>
+            </a:r>
+          </a:p>
+          <a:p>
+            <a:pPr lvl="1"/>
+            <a:r>
+              <a:t>Section 3: Automation backlog refinement. EMP030 contributes to ast emp030 01 through recurring collaboration, clear ownership boundaries, and measurable outcomes. The team captures decisions, open issues, and handoffs so that knowledge remains discoverable for future programs.</a:t>
             </a:r>
           </a:p>
         </p:txBody>
